--- a/stats_case_study/case_studies/22_statistical_vs_practical_significance/presentation/case_study_presentation.pptx
+++ b/stats_case_study/case_studies/22_statistical_vs_practical_significance/presentation/case_study_presentation.pptx
@@ -5407,8 +5407,8 @@
         </p:blipFill>
         <p:spPr>
           <a:xfrm>
-            <a:off x="548640" y="1635765"/>
-            <a:ext cx="11094415" cy="3632189"/>
+            <a:off x="548640" y="1630166"/>
+            <a:ext cx="11094415" cy="3643387"/>
           </a:xfrm>
           <a:prstGeom prst="rect">
             <a:avLst/>
@@ -5690,8 +5690,8 @@
         </p:blipFill>
         <p:spPr>
           <a:xfrm>
-            <a:off x="548640" y="1693103"/>
-            <a:ext cx="11094415" cy="3517513"/>
+            <a:off x="548640" y="1685352"/>
+            <a:ext cx="11094415" cy="3533015"/>
           </a:xfrm>
           <a:prstGeom prst="rect">
             <a:avLst/>
@@ -5973,8 +5973,8 @@
         </p:blipFill>
         <p:spPr>
           <a:xfrm>
-            <a:off x="548640" y="1589455"/>
-            <a:ext cx="11094415" cy="3724810"/>
+            <a:off x="548640" y="1590126"/>
+            <a:ext cx="11094415" cy="3723468"/>
           </a:xfrm>
           <a:prstGeom prst="rect">
             <a:avLst/>
@@ -6256,8 +6256,8 @@
         </p:blipFill>
         <p:spPr>
           <a:xfrm>
-            <a:off x="2077388" y="1554480"/>
-            <a:ext cx="8036919" cy="3794760"/>
+            <a:off x="2092295" y="1554480"/>
+            <a:ext cx="8007105" cy="3794760"/>
           </a:xfrm>
           <a:prstGeom prst="rect">
             <a:avLst/>
@@ -6539,8 +6539,8 @@
         </p:blipFill>
         <p:spPr>
           <a:xfrm>
-            <a:off x="1674728" y="1554480"/>
-            <a:ext cx="8842238" cy="3794760"/>
+            <a:off x="1686872" y="1554480"/>
+            <a:ext cx="8817951" cy="3794760"/>
           </a:xfrm>
           <a:prstGeom prst="rect">
             <a:avLst/>
@@ -7337,8 +7337,8 @@
         </p:blipFill>
         <p:spPr>
           <a:xfrm>
-            <a:off x="1472444" y="1554480"/>
-            <a:ext cx="9246806" cy="3794760"/>
+            <a:off x="1490042" y="1554480"/>
+            <a:ext cx="9211610" cy="3794760"/>
           </a:xfrm>
           <a:prstGeom prst="rect">
             <a:avLst/>
